--- a/templates/due_prenetation_template.pptx
+++ b/templates/due_prenetation_template.pptx
@@ -2875,7 +2875,7 @@
           <a:p>
             <a:fld id="{5BCAD085-E8A6-8845-BD4E-CB4CCA059FC4}" type="datetimeFigureOut">
               <a:rPr lang="en-US" smtClean="0"/>
-              <a:t>5/29/2026</a:t>
+              <a:t>6/3/2026</a:t>
             </a:fld>
             <a:endParaRPr lang="en-US"/>
           </a:p>
@@ -3043,7 +3043,7 @@
           <a:p>
             <a:fld id="{5BCAD085-E8A6-8845-BD4E-CB4CCA059FC4}" type="datetimeFigureOut">
               <a:rPr lang="en-US" smtClean="0"/>
-              <a:t>5/29/2026</a:t>
+              <a:t>6/3/2026</a:t>
             </a:fld>
             <a:endParaRPr lang="en-US"/>
           </a:p>
@@ -3221,7 +3221,7 @@
           <a:p>
             <a:fld id="{5BCAD085-E8A6-8845-BD4E-CB4CCA059FC4}" type="datetimeFigureOut">
               <a:rPr lang="en-US" smtClean="0"/>
-              <a:t>5/29/2026</a:t>
+              <a:t>6/3/2026</a:t>
             </a:fld>
             <a:endParaRPr lang="en-US"/>
           </a:p>
@@ -3389,7 +3389,7 @@
           <a:p>
             <a:fld id="{5BCAD085-E8A6-8845-BD4E-CB4CCA059FC4}" type="datetimeFigureOut">
               <a:rPr lang="en-US" smtClean="0"/>
-              <a:t>5/29/2026</a:t>
+              <a:t>6/3/2026</a:t>
             </a:fld>
             <a:endParaRPr lang="en-US"/>
           </a:p>
@@ -3634,7 +3634,7 @@
           <a:p>
             <a:fld id="{5BCAD085-E8A6-8845-BD4E-CB4CCA059FC4}" type="datetimeFigureOut">
               <a:rPr lang="en-US" smtClean="0"/>
-              <a:t>5/29/2026</a:t>
+              <a:t>6/3/2026</a:t>
             </a:fld>
             <a:endParaRPr lang="en-US"/>
           </a:p>
@@ -3919,7 +3919,7 @@
           <a:p>
             <a:fld id="{5BCAD085-E8A6-8845-BD4E-CB4CCA059FC4}" type="datetimeFigureOut">
               <a:rPr lang="en-US" smtClean="0"/>
-              <a:t>5/29/2026</a:t>
+              <a:t>6/3/2026</a:t>
             </a:fld>
             <a:endParaRPr lang="en-US"/>
           </a:p>
@@ -4338,7 +4338,7 @@
           <a:p>
             <a:fld id="{5BCAD085-E8A6-8845-BD4E-CB4CCA059FC4}" type="datetimeFigureOut">
               <a:rPr lang="en-US" smtClean="0"/>
-              <a:t>5/29/2026</a:t>
+              <a:t>6/3/2026</a:t>
             </a:fld>
             <a:endParaRPr lang="en-US"/>
           </a:p>
@@ -4455,7 +4455,7 @@
           <a:p>
             <a:fld id="{5BCAD085-E8A6-8845-BD4E-CB4CCA059FC4}" type="datetimeFigureOut">
               <a:rPr lang="en-US" smtClean="0"/>
-              <a:t>5/29/2026</a:t>
+              <a:t>6/3/2026</a:t>
             </a:fld>
             <a:endParaRPr lang="en-US"/>
           </a:p>
@@ -4550,7 +4550,7 @@
           <a:p>
             <a:fld id="{5BCAD085-E8A6-8845-BD4E-CB4CCA059FC4}" type="datetimeFigureOut">
               <a:rPr lang="en-US" smtClean="0"/>
-              <a:t>5/29/2026</a:t>
+              <a:t>6/3/2026</a:t>
             </a:fld>
             <a:endParaRPr lang="en-US"/>
           </a:p>
@@ -4825,7 +4825,7 @@
           <a:p>
             <a:fld id="{5BCAD085-E8A6-8845-BD4E-CB4CCA059FC4}" type="datetimeFigureOut">
               <a:rPr lang="en-US" smtClean="0"/>
-              <a:t>5/29/2026</a:t>
+              <a:t>6/3/2026</a:t>
             </a:fld>
             <a:endParaRPr lang="en-US"/>
           </a:p>
@@ -5077,7 +5077,7 @@
           <a:p>
             <a:fld id="{5BCAD085-E8A6-8845-BD4E-CB4CCA059FC4}" type="datetimeFigureOut">
               <a:rPr lang="en-US" smtClean="0"/>
-              <a:t>5/29/2026</a:t>
+              <a:t>6/3/2026</a:t>
             </a:fld>
             <a:endParaRPr lang="en-US"/>
           </a:p>
@@ -5288,7 +5288,7 @@
           <a:p>
             <a:fld id="{5BCAD085-E8A6-8845-BD4E-CB4CCA059FC4}" type="datetimeFigureOut">
               <a:rPr lang="en-US" smtClean="0"/>
-              <a:t>5/29/2026</a:t>
+              <a:t>6/3/2026</a:t>
             </a:fld>
             <a:endParaRPr lang="en-US"/>
           </a:p>
@@ -6008,14 +6008,20 @@
           <a:p>
             <a:pPr algn="l"/>
             <a:r>
-              <a:rPr sz="1300" b="0" i="0">
+              <a:rPr lang="hu-HU" sz="1300" dirty="0">
                 <a:solidFill>
                   <a:srgbClr val="7A8A9E"/>
                 </a:solidFill>
                 <a:latin typeface="Aptos" panose="020B0004020202020204" pitchFamily="34" charset="0"/>
               </a:rPr>
-              <a:t>Dr. Hári László</a:t>
-            </a:r>
+              <a:t>Előadó neve</a:t>
+            </a:r>
+            <a:endParaRPr sz="1300" b="0" i="0" dirty="0">
+              <a:solidFill>
+                <a:srgbClr val="7A8A9E"/>
+              </a:solidFill>
+              <a:latin typeface="Aptos" panose="020B0004020202020204" pitchFamily="34" charset="0"/>
+            </a:endParaRPr>
           </a:p>
         </p:txBody>
       </p:sp>
